--- a/CNC-Plasma/assets/downloads/module-05-classroom.pptx
+++ b/CNC-Plasma/assets/downloads/module-05-classroom.pptx
@@ -2,20 +2,20 @@
 <file path=ppt/presentation.xml><?xml version="1.0" encoding="utf-8"?>
 <p:presentation xmlns:p="http://schemas.openxmlformats.org/presentationml/2006/main">
   <p:sldMasterIdLst>
-    <p:sldMasterId xmlns:r="http://schemas.openxmlformats.org/officeDocument/2006/relationships" id="2147483648" r:id="R4b185f78d4b045a3"/>
+    <p:sldMasterId xmlns:r="http://schemas.openxmlformats.org/officeDocument/2006/relationships" id="2147483648" r:id="R4ce31c4e7239465f"/>
   </p:sldMasterIdLst>
   <p:notesMasterIdLst>
-    <p:notesMasterId xmlns:r="http://schemas.openxmlformats.org/officeDocument/2006/relationships" r:id="Rce408550d4ac4b77"/>
+    <p:notesMasterId xmlns:r="http://schemas.openxmlformats.org/officeDocument/2006/relationships" r:id="R6c967403aa0540bb"/>
   </p:notesMasterIdLst>
   <p:sldIdLst>
-    <p:sldId xmlns:r="http://schemas.openxmlformats.org/officeDocument/2006/relationships" id="256" r:id="Rb32f2d83e0c34275"/>
-    <p:sldId xmlns:r="http://schemas.openxmlformats.org/officeDocument/2006/relationships" id="257" r:id="R1ac517df4a2c4b48"/>
-    <p:sldId xmlns:r="http://schemas.openxmlformats.org/officeDocument/2006/relationships" id="258" r:id="Rd72e67b578fc433c"/>
-    <p:sldId xmlns:r="http://schemas.openxmlformats.org/officeDocument/2006/relationships" id="259" r:id="R611b3594b9334ca1"/>
-    <p:sldId xmlns:r="http://schemas.openxmlformats.org/officeDocument/2006/relationships" id="260" r:id="Rd824c583f04b4d34"/>
-    <p:sldId xmlns:r="http://schemas.openxmlformats.org/officeDocument/2006/relationships" id="261" r:id="R43277db8d66b466c"/>
-    <p:sldId xmlns:r="http://schemas.openxmlformats.org/officeDocument/2006/relationships" id="262" r:id="Rb69eaded52544056"/>
-    <p:sldId xmlns:r="http://schemas.openxmlformats.org/officeDocument/2006/relationships" id="263" r:id="Reac3996bba724eac"/>
+    <p:sldId xmlns:r="http://schemas.openxmlformats.org/officeDocument/2006/relationships" id="256" r:id="R765af80c04a54b0f"/>
+    <p:sldId xmlns:r="http://schemas.openxmlformats.org/officeDocument/2006/relationships" id="257" r:id="R62836549ac764c09"/>
+    <p:sldId xmlns:r="http://schemas.openxmlformats.org/officeDocument/2006/relationships" id="258" r:id="R03d2f70b44a94ea4"/>
+    <p:sldId xmlns:r="http://schemas.openxmlformats.org/officeDocument/2006/relationships" id="259" r:id="Rf2e5381cf80f4736"/>
+    <p:sldId xmlns:r="http://schemas.openxmlformats.org/officeDocument/2006/relationships" id="260" r:id="Rdc66428e45e74818"/>
+    <p:sldId xmlns:r="http://schemas.openxmlformats.org/officeDocument/2006/relationships" id="261" r:id="R58fb8101780f4c32"/>
+    <p:sldId xmlns:r="http://schemas.openxmlformats.org/officeDocument/2006/relationships" id="262" r:id="R507033b4c5e24eca"/>
+    <p:sldId xmlns:r="http://schemas.openxmlformats.org/officeDocument/2006/relationships" id="263" r:id="R3cb792e3404343ee"/>
   </p:sldIdLst>
   <p:sldSz cx="12192000" cy="6858000"/>
   <p:notesSz cx="6858000" cy="9144000"/>
@@ -472,6 +472,26 @@
               <a:t>Source: Improving cut quality taper and bevel.pdf</a:t>
             </a:r>
           </a:p>
+          <a:p xmlns:a="http://schemas.openxmlformats.org/drawingml/2006/main">
+            <a:r>
+              <a:t/>
+            </a:r>
+          </a:p>
+          <a:p xmlns:a="http://schemas.openxmlformats.org/drawingml/2006/main">
+            <a:r>
+              <a:t/>
+            </a:r>
+          </a:p>
+          <a:p xmlns:a="http://schemas.openxmlformats.org/drawingml/2006/main">
+            <a:r>
+              <a:t>ILLUSTRATIVE IMAGE</a:t>
+            </a:r>
+          </a:p>
+          <a:p xmlns:a="http://schemas.openxmlformats.org/drawingml/2006/main">
+            <a:r>
+              <a:t>AI-generated concept illustration for Check, improve and communicate. This illustration supports discussion and is not a photograph of the school installation, a software screenshot, or a machine-setting guide. Original source reference images remain on this slide where present.</a:t>
+            </a:r>
+          </a:p>
         </p:txBody>
       </p:sp>
       <p:sp>
@@ -557,6 +577,26 @@
               <a:t>m05-s03: Justify your final evaluation and one practical improvement to your design or file-preparation process. Connect your judgement to evidence and identify what has actually been completed, what the trained teacher undertook and what still needs checking.</a:t>
             </a:r>
           </a:p>
+          <a:p xmlns:a="http://schemas.openxmlformats.org/drawingml/2006/main">
+            <a:r>
+              <a:t/>
+            </a:r>
+          </a:p>
+          <a:p xmlns:a="http://schemas.openxmlformats.org/drawingml/2006/main">
+            <a:r>
+              <a:t/>
+            </a:r>
+          </a:p>
+          <a:p xmlns:a="http://schemas.openxmlformats.org/drawingml/2006/main">
+            <a:r>
+              <a:t>ILLUSTRATIVE IMAGE</a:t>
+            </a:r>
+          </a:p>
+          <a:p xmlns:a="http://schemas.openxmlformats.org/drawingml/2006/main">
+            <a:r>
+              <a:t>AI-generated concept illustration for Today’s learning map. This illustration supports discussion and is not a photograph of the school installation, a software screenshot, or a machine-setting guide. Original source reference images remain on this slide where present.</a:t>
+            </a:r>
+          </a:p>
         </p:txBody>
       </p:sp>
       <p:sp>
@@ -912,6 +952,26 @@
               <a:t>Use the section’s ten questions for individual retrieval and feedback. Do not infer practical competence from online completion.</a:t>
             </a:r>
           </a:p>
+          <a:p xmlns:a="http://schemas.openxmlformats.org/drawingml/2006/main">
+            <a:r>
+              <a:t/>
+            </a:r>
+          </a:p>
+          <a:p xmlns:a="http://schemas.openxmlformats.org/drawingml/2006/main">
+            <a:r>
+              <a:t/>
+            </a:r>
+          </a:p>
+          <a:p xmlns:a="http://schemas.openxmlformats.org/drawingml/2006/main">
+            <a:r>
+              <a:t>ILLUSTRATIVE IMAGE</a:t>
+            </a:r>
+          </a:p>
+          <a:p xmlns:a="http://schemas.openxmlformats.org/drawingml/2006/main">
+            <a:r>
+              <a:t>AI-generated concept illustration for Describe the result precisely. This illustration supports discussion and is not a photograph of the school installation, a software screenshot, or a machine-setting guide. Original source reference images remain on this slide where present.</a:t>
+            </a:r>
+          </a:p>
         </p:txBody>
       </p:sp>
       <p:sp>
@@ -1272,6 +1332,26 @@
               <a:t>Use the section’s ten questions for individual retrieval and feedback. Do not infer practical competence from online completion.</a:t>
             </a:r>
           </a:p>
+          <a:p xmlns:a="http://schemas.openxmlformats.org/drawingml/2006/main">
+            <a:r>
+              <a:t/>
+            </a:r>
+          </a:p>
+          <a:p xmlns:a="http://schemas.openxmlformats.org/drawingml/2006/main">
+            <a:r>
+              <a:t/>
+            </a:r>
+          </a:p>
+          <a:p xmlns:a="http://schemas.openxmlformats.org/drawingml/2006/main">
+            <a:r>
+              <a:t>ILLUSTRATIVE IMAGE</a:t>
+            </a:r>
+          </a:p>
+          <a:p xmlns:a="http://schemas.openxmlformats.org/drawingml/2006/main">
+            <a:r>
+              <a:t>AI-generated concept illustration for Separate observation from diagnosis. This illustration supports discussion and is not a photograph of the school installation, a software screenshot, or a machine-setting guide. Original source reference images remain on this slide where present.</a:t>
+            </a:r>
+          </a:p>
         </p:txBody>
       </p:sp>
       <p:sp>
@@ -1627,6 +1707,26 @@
               <a:t>Use the section’s ten questions for individual retrieval and feedback. Do not infer practical competence from online completion.</a:t>
             </a:r>
           </a:p>
+          <a:p xmlns:a="http://schemas.openxmlformats.org/drawingml/2006/main">
+            <a:r>
+              <a:t/>
+            </a:r>
+          </a:p>
+          <a:p xmlns:a="http://schemas.openxmlformats.org/drawingml/2006/main">
+            <a:r>
+              <a:t/>
+            </a:r>
+          </a:p>
+          <a:p xmlns:a="http://schemas.openxmlformats.org/drawingml/2006/main">
+            <a:r>
+              <a:t>ILLUSTRATIVE IMAGE</a:t>
+            </a:r>
+          </a:p>
+          <a:p xmlns:a="http://schemas.openxmlformats.org/drawingml/2006/main">
+            <a:r>
+              <a:t>AI-generated concept illustration for Make the improvement traceable. This illustration supports discussion and is not a photograph of the school installation, a software screenshot, or a machine-setting guide. Original source reference images remain on this slide where present.</a:t>
+            </a:r>
+          </a:p>
         </p:txBody>
       </p:sp>
       <p:sp>
@@ -1712,6 +1812,26 @@
               <a:t>Which two pieces of evidence best support your proposed improvement?</a:t>
             </a:r>
           </a:p>
+          <a:p xmlns:a="http://schemas.openxmlformats.org/drawingml/2006/main">
+            <a:r>
+              <a:t/>
+            </a:r>
+          </a:p>
+          <a:p xmlns:a="http://schemas.openxmlformats.org/drawingml/2006/main">
+            <a:r>
+              <a:t/>
+            </a:r>
+          </a:p>
+          <a:p xmlns:a="http://schemas.openxmlformats.org/drawingml/2006/main">
+            <a:r>
+              <a:t>ILLUSTRATIVE IMAGE</a:t>
+            </a:r>
+          </a:p>
+          <a:p xmlns:a="http://schemas.openxmlformats.org/drawingml/2006/main">
+            <a:r>
+              <a:t>AI-generated concept illustration for Pause before looking back. This illustration supports discussion and is not a photograph of the school installation, a software screenshot, or a machine-setting guide. Original source reference images remain on this slide where present.</a:t>
+            </a:r>
+          </a:p>
         </p:txBody>
       </p:sp>
       <p:sp>
@@ -1797,6 +1917,26 @@
               <a:t>Explains a specific improvement and a traceable checking process without inventing a physical result or operational permission.</a:t>
             </a:r>
           </a:p>
+          <a:p xmlns:a="http://schemas.openxmlformats.org/drawingml/2006/main">
+            <a:r>
+              <a:t/>
+            </a:r>
+          </a:p>
+          <a:p xmlns:a="http://schemas.openxmlformats.org/drawingml/2006/main">
+            <a:r>
+              <a:t/>
+            </a:r>
+          </a:p>
+          <a:p xmlns:a="http://schemas.openxmlformats.org/drawingml/2006/main">
+            <a:r>
+              <a:t>ILLUSTRATIVE IMAGE</a:t>
+            </a:r>
+          </a:p>
+          <a:p xmlns:a="http://schemas.openxmlformats.org/drawingml/2006/main">
+            <a:r>
+              <a:t>AI-generated concept illustration for Explain your decision with evidence. This illustration supports discussion and is not a photograph of the school installation, a software screenshot, or a machine-setting guide. Original source reference images remain on this slide where present.</a:t>
+            </a:r>
+          </a:p>
         </p:txBody>
       </p:sp>
       <p:sp>
@@ -1865,6 +2005,26 @@
           <a:p xmlns:a="http://schemas.openxmlformats.org/drawingml/2006/main">
             <a:r>
               <a:t>Open modules/module-05.html#module-05-review. Review completion and feedback rather than treating checked answers as a competence result. Keep original CAD files separately. Students should state their own contribution and identify teacher-controlled production honestly.</a:t>
+            </a:r>
+          </a:p>
+          <a:p xmlns:a="http://schemas.openxmlformats.org/drawingml/2006/main">
+            <a:r>
+              <a:t/>
+            </a:r>
+          </a:p>
+          <a:p xmlns:a="http://schemas.openxmlformats.org/drawingml/2006/main">
+            <a:r>
+              <a:t/>
+            </a:r>
+          </a:p>
+          <a:p xmlns:a="http://schemas.openxmlformats.org/drawingml/2006/main">
+            <a:r>
+              <a:t>ILLUSTRATIVE IMAGE</a:t>
+            </a:r>
+          </a:p>
+          <a:p xmlns:a="http://schemas.openxmlformats.org/drawingml/2006/main">
+            <a:r>
+              <a:t>AI-generated concept illustration for Leave with something useful. This illustration supports discussion and is not a photograph of the school installation, a software screenshot, or a machine-setting guide. Original source reference images remain on this slide where present.</a:t>
             </a:r>
           </a:p>
         </p:txBody>
@@ -1932,7 +2092,7 @@
   </p:cSld>
   <p:clrMap bg1="lt1" tx1="dk1" bg2="lt2" tx2="dk2" accent1="accent1" accent2="accent2" accent3="accent3" accent4="accent4" accent5="accent5" accent6="accent6" hlink="hlink" folHlink="folHlink"/>
   <p:sldLayoutIdLst>
-    <p:sldLayoutId xmlns:r="http://schemas.openxmlformats.org/officeDocument/2006/relationships" id="2147483649" r:id="Rc21580c7359b4fbc"/>
+    <p:sldLayoutId xmlns:r="http://schemas.openxmlformats.org/officeDocument/2006/relationships" id="2147483649" r:id="R8857615b8ed24fa8"/>
   </p:sldLayoutIdLst>
   <p:txStyles>
     <p:titleStyle>
@@ -2542,6 +2702,7 @@
           <a:lstStyle xmlns:a="http://schemas.openxmlformats.org/drawingml/2006/main"/>
           <a:p xmlns:a="http://schemas.openxmlformats.org/drawingml/2006/main">
             <a:pPr>
+              <a:buNone/>
               <a:defRPr sz="1200" b="1">
                 <a:solidFill>
                   <a:srgbClr val="2F6079"/>
@@ -2599,6 +2760,7 @@
           <a:lstStyle xmlns:a="http://schemas.openxmlformats.org/drawingml/2006/main"/>
           <a:p xmlns:a="http://schemas.openxmlformats.org/drawingml/2006/main">
             <a:pPr>
+              <a:buNone/>
               <a:defRPr sz="1050" b="0">
                 <a:solidFill>
                   <a:srgbClr val="526571"/>
@@ -2656,6 +2818,7 @@
           <a:lstStyle xmlns:a="http://schemas.openxmlformats.org/drawingml/2006/main"/>
           <a:p xmlns:a="http://schemas.openxmlformats.org/drawingml/2006/main">
             <a:pPr>
+              <a:buNone/>
               <a:defRPr sz="1125" b="1">
                 <a:solidFill>
                   <a:srgbClr val="2F6079"/>
@@ -2713,6 +2876,7 @@
           <a:lstStyle xmlns:a="http://schemas.openxmlformats.org/drawingml/2006/main"/>
           <a:p xmlns:a="http://schemas.openxmlformats.org/drawingml/2006/main">
             <a:pPr>
+              <a:buNone/>
               <a:defRPr sz="3525" b="1">
                 <a:solidFill>
                   <a:srgbClr val="18303F"/>
@@ -2770,6 +2934,7 @@
           <a:lstStyle xmlns:a="http://schemas.openxmlformats.org/drawingml/2006/main"/>
           <a:p xmlns:a="http://schemas.openxmlformats.org/drawingml/2006/main">
             <a:pPr>
+              <a:buNone/>
               <a:defRPr sz="2025" b="0">
                 <a:solidFill>
                   <a:srgbClr val="18303F"/>
@@ -2827,6 +2992,7 @@
           <a:lstStyle xmlns:a="http://schemas.openxmlformats.org/drawingml/2006/main"/>
           <a:p xmlns:a="http://schemas.openxmlformats.org/drawingml/2006/main">
             <a:pPr>
+              <a:buNone/>
               <a:defRPr sz="1725" b="1">
                 <a:solidFill>
                   <a:srgbClr val="2F6079"/>
@@ -2867,7 +3033,7 @@
         <p:spPr>
           <a:xfrm xmlns:a="http://schemas.openxmlformats.org/drawingml/2006/main">
             <a:off x="6334125" y="1009650"/>
-            <a:ext cx="5314950" cy="4933950"/>
+            <a:ext cx="5314950" cy="4400550"/>
           </a:xfrm>
           <a:prstGeom xmlns:a="http://schemas.openxmlformats.org/drawingml/2006/main" prst="rect">
             <a:avLst/>
@@ -2882,20 +3048,20 @@
       </p:sp>
       <p:pic>
         <p:nvPicPr>
-          <p:cNvPr id="19" name=""/>
+          <p:cNvPr id="21" name=""/>
           <p:cNvPicPr>
             <a:picLocks xmlns:a="http://schemas.openxmlformats.org/drawingml/2006/main" noChangeAspect="1"/>
           </p:cNvPicPr>
           <p:nvPr/>
         </p:nvPicPr>
         <p:blipFill>
-          <a:blip xmlns:r="http://schemas.openxmlformats.org/officeDocument/2006/relationships" xmlns:a="http://schemas.openxmlformats.org/drawingml/2006/main" r:embed="Rb20fa10972d24fd6"/>
+          <a:blip xmlns:r="http://schemas.openxmlformats.org/officeDocument/2006/relationships" xmlns:a="http://schemas.openxmlformats.org/drawingml/2006/main" r:embed="Rd10bb8ce2fb146b9"/>
           <a:stretch xmlns:a="http://schemas.openxmlformats.org/drawingml/2006/main"/>
         </p:blipFill>
         <p:spPr>
           <a:xfrm xmlns:a="http://schemas.openxmlformats.org/drawingml/2006/main">
-            <a:off x="6524625" y="1707952"/>
-            <a:ext cx="4933950" cy="2775347"/>
+            <a:off x="6524625" y="1302377"/>
+            <a:ext cx="4933950" cy="3367421"/>
           </a:xfrm>
           <a:prstGeom xmlns:a="http://schemas.openxmlformats.org/drawingml/2006/main" prst="rect">
             <a:avLst/>
@@ -2918,8 +3084,8 @@
         </p:nvSpPr>
         <p:spPr>
           <a:xfrm xmlns:a="http://schemas.openxmlformats.org/drawingml/2006/main">
-            <a:off x="6543675" y="5238750"/>
-            <a:ext cx="4857750" cy="523875"/>
+            <a:off x="6524625" y="4895850"/>
+            <a:ext cx="4933950" cy="381000"/>
           </a:xfrm>
           <a:prstGeom xmlns:a="http://schemas.openxmlformats.org/drawingml/2006/main" prst="rect">
             <a:avLst/>
@@ -2936,9 +3102,10 @@
           <a:lstStyle xmlns:a="http://schemas.openxmlformats.org/drawingml/2006/main"/>
           <a:p xmlns:a="http://schemas.openxmlformats.org/drawingml/2006/main">
             <a:pPr>
+              <a:buNone/>
               <a:defRPr sz="1275" b="0">
                 <a:solidFill>
-                  <a:srgbClr val="526571"/>
+                  <a:srgbClr val="18303F"/>
                 </a:solidFill>
                 <a:latin typeface="Arial"/>
                 <a:ea typeface="Arial"/>
@@ -2948,13 +3115,13 @@
             <a:r>
               <a:rPr sz="1275" b="0">
                 <a:solidFill>
-                  <a:srgbClr val="526571"/>
+                  <a:srgbClr val="18303F"/>
                 </a:solidFill>
                 <a:latin typeface="Arial"/>
                 <a:ea typeface="Arial"/>
                 <a:cs typeface="Arial"/>
               </a:rPr>
-              <a:t>Source reference / teaching example</a:t>
+              <a:t>AI-generated concept image</a:t>
             </a:r>
           </a:p>
         </p:txBody>
@@ -3052,6 +3219,7 @@
           <a:lstStyle xmlns:a="http://schemas.openxmlformats.org/drawingml/2006/main"/>
           <a:p xmlns:a="http://schemas.openxmlformats.org/drawingml/2006/main">
             <a:pPr>
+              <a:buNone/>
               <a:defRPr sz="1200" b="1">
                 <a:solidFill>
                   <a:srgbClr val="2F6079"/>
@@ -3109,6 +3277,7 @@
           <a:lstStyle xmlns:a="http://schemas.openxmlformats.org/drawingml/2006/main"/>
           <a:p xmlns:a="http://schemas.openxmlformats.org/drawingml/2006/main">
             <a:pPr>
+              <a:buNone/>
               <a:defRPr sz="1050" b="0">
                 <a:solidFill>
                   <a:srgbClr val="526571"/>
@@ -3166,6 +3335,7 @@
           <a:lstStyle xmlns:a="http://schemas.openxmlformats.org/drawingml/2006/main"/>
           <a:p xmlns:a="http://schemas.openxmlformats.org/drawingml/2006/main">
             <a:pPr>
+              <a:buNone/>
               <a:defRPr sz="1125" b="1">
                 <a:solidFill>
                   <a:srgbClr val="2F6079"/>
@@ -3223,6 +3393,7 @@
           <a:lstStyle xmlns:a="http://schemas.openxmlformats.org/drawingml/2006/main"/>
           <a:p xmlns:a="http://schemas.openxmlformats.org/drawingml/2006/main">
             <a:pPr>
+              <a:buNone/>
               <a:defRPr sz="3225" b="1">
                 <a:solidFill>
                   <a:srgbClr val="18303F"/>
@@ -3280,6 +3451,7 @@
           <a:lstStyle xmlns:a="http://schemas.openxmlformats.org/drawingml/2006/main"/>
           <a:p xmlns:a="http://schemas.openxmlformats.org/drawingml/2006/main">
             <a:pPr>
+              <a:buNone/>
               <a:defRPr sz="3450" b="1">
                 <a:solidFill>
                   <a:srgbClr val="2F6079"/>
@@ -3320,7 +3492,7 @@
         <p:spPr>
           <a:xfrm xmlns:a="http://schemas.openxmlformats.org/drawingml/2006/main">
             <a:off x="1562100" y="2143125"/>
-            <a:ext cx="9620250" cy="742950"/>
+            <a:ext cx="6096000" cy="952500"/>
           </a:xfrm>
           <a:prstGeom xmlns:a="http://schemas.openxmlformats.org/drawingml/2006/main" prst="rect">
             <a:avLst/>
@@ -3337,7 +3509,8 @@
           <a:lstStyle xmlns:a="http://schemas.openxmlformats.org/drawingml/2006/main"/>
           <a:p xmlns:a="http://schemas.openxmlformats.org/drawingml/2006/main">
             <a:pPr>
-              <a:defRPr sz="2175" b="1">
+              <a:buNone/>
+              <a:defRPr sz="2100" b="1">
                 <a:solidFill>
                   <a:srgbClr val="18303F"/>
                 </a:solidFill>
@@ -3347,7 +3520,7 @@
               </a:defRPr>
             </a:pPr>
             <a:r>
-              <a:rPr sz="2175" b="1">
+              <a:rPr sz="2100" b="1">
                 <a:solidFill>
                   <a:srgbClr val="18303F"/>
                 </a:solidFill>
@@ -3394,6 +3567,7 @@
           <a:lstStyle xmlns:a="http://schemas.openxmlformats.org/drawingml/2006/main"/>
           <a:p xmlns:a="http://schemas.openxmlformats.org/drawingml/2006/main">
             <a:pPr>
+              <a:buNone/>
               <a:defRPr sz="3450" b="1">
                 <a:solidFill>
                   <a:srgbClr val="2F6079"/>
@@ -3434,7 +3608,7 @@
         <p:spPr>
           <a:xfrm xmlns:a="http://schemas.openxmlformats.org/drawingml/2006/main">
             <a:off x="1562100" y="3286125"/>
-            <a:ext cx="9620250" cy="742950"/>
+            <a:ext cx="6096000" cy="952500"/>
           </a:xfrm>
           <a:prstGeom xmlns:a="http://schemas.openxmlformats.org/drawingml/2006/main" prst="rect">
             <a:avLst/>
@@ -3451,7 +3625,8 @@
           <a:lstStyle xmlns:a="http://schemas.openxmlformats.org/drawingml/2006/main"/>
           <a:p xmlns:a="http://schemas.openxmlformats.org/drawingml/2006/main">
             <a:pPr>
-              <a:defRPr sz="2175" b="1">
+              <a:buNone/>
+              <a:defRPr sz="2100" b="1">
                 <a:solidFill>
                   <a:srgbClr val="18303F"/>
                 </a:solidFill>
@@ -3461,7 +3636,7 @@
               </a:defRPr>
             </a:pPr>
             <a:r>
-              <a:rPr sz="2175" b="1">
+              <a:rPr sz="2100" b="1">
                 <a:solidFill>
                   <a:srgbClr val="18303F"/>
                 </a:solidFill>
@@ -3508,6 +3683,7 @@
           <a:lstStyle xmlns:a="http://schemas.openxmlformats.org/drawingml/2006/main"/>
           <a:p xmlns:a="http://schemas.openxmlformats.org/drawingml/2006/main">
             <a:pPr>
+              <a:buNone/>
               <a:defRPr sz="3450" b="1">
                 <a:solidFill>
                   <a:srgbClr val="2F6079"/>
@@ -3548,7 +3724,7 @@
         <p:spPr>
           <a:xfrm xmlns:a="http://schemas.openxmlformats.org/drawingml/2006/main">
             <a:off x="1562100" y="4429125"/>
-            <a:ext cx="9620250" cy="742950"/>
+            <a:ext cx="6096000" cy="952500"/>
           </a:xfrm>
           <a:prstGeom xmlns:a="http://schemas.openxmlformats.org/drawingml/2006/main" prst="rect">
             <a:avLst/>
@@ -3565,7 +3741,8 @@
           <a:lstStyle xmlns:a="http://schemas.openxmlformats.org/drawingml/2006/main"/>
           <a:p xmlns:a="http://schemas.openxmlformats.org/drawingml/2006/main">
             <a:pPr>
-              <a:defRPr sz="2175" b="1">
+              <a:buNone/>
+              <a:defRPr sz="2100" b="1">
                 <a:solidFill>
                   <a:srgbClr val="18303F"/>
                 </a:solidFill>
@@ -3575,7 +3752,7 @@
               </a:defRPr>
             </a:pPr>
             <a:r>
-              <a:rPr sz="2175" b="1">
+              <a:rPr sz="2100" b="1">
                 <a:solidFill>
                   <a:srgbClr val="18303F"/>
                 </a:solidFill>
@@ -3622,6 +3799,7 @@
           <a:lstStyle xmlns:a="http://schemas.openxmlformats.org/drawingml/2006/main"/>
           <a:p xmlns:a="http://schemas.openxmlformats.org/drawingml/2006/main">
             <a:pPr>
+              <a:buNone/>
               <a:defRPr sz="1725" b="0">
                 <a:solidFill>
                   <a:srgbClr val="2F6079"/>
@@ -3641,6 +3819,85 @@
                 <a:cs typeface="Arial"/>
               </a:rPr>
               <a:t>Before we begin: which step in the workflow needs the strongest check?</a:t>
+            </a:r>
+          </a:p>
+        </p:txBody>
+      </p:sp>
+      <p:pic>
+        <p:nvPicPr>
+          <p:cNvPr id="28" name=""/>
+          <p:cNvPicPr>
+            <a:picLocks xmlns:a="http://schemas.openxmlformats.org/drawingml/2006/main" noChangeAspect="1"/>
+          </p:cNvPicPr>
+          <p:nvPr/>
+        </p:nvPicPr>
+        <p:blipFill>
+          <a:blip xmlns:r="http://schemas.openxmlformats.org/officeDocument/2006/relationships" xmlns:a="http://schemas.openxmlformats.org/drawingml/2006/main" r:embed="R7881270484644ebe"/>
+          <a:stretch xmlns:a="http://schemas.openxmlformats.org/drawingml/2006/main"/>
+        </p:blipFill>
+        <p:spPr>
+          <a:xfrm xmlns:a="http://schemas.openxmlformats.org/drawingml/2006/main">
+            <a:off x="7858125" y="2444750"/>
+            <a:ext cx="3810000" cy="2540000"/>
+          </a:xfrm>
+          <a:prstGeom xmlns:a="http://schemas.openxmlformats.org/drawingml/2006/main" prst="rect">
+            <a:avLst/>
+          </a:prstGeom>
+        </p:spPr>
+      </p:pic>
+      <p:sp>
+        <p:nvSpPr>
+          <p:cNvPr id="15" name="">
+            <a:extLst xmlns:a="http://schemas.openxmlformats.org/drawingml/2006/main">
+              <a:ext uri="{FF2B5EF4-FFF2-40B4-BE49-F238E27FC236}">
+                <a16:creationId xmlns:a16="http://schemas.microsoft.com/office/drawing/2014/main" id="{07F6E732-777A-4F3E-BED8-78616DEC90C2}"/>
+              </a:ext>
+            </a:extLst>
+          </p:cNvPr>
+          <p:cNvSpPr>
+            <a:spLocks xmlns:a="http://schemas.openxmlformats.org/drawingml/2006/main" noGrp="1"/>
+          </p:cNvSpPr>
+          <p:nvPr/>
+        </p:nvSpPr>
+        <p:spPr>
+          <a:xfrm xmlns:a="http://schemas.openxmlformats.org/drawingml/2006/main">
+            <a:off x="7858125" y="5562600"/>
+            <a:ext cx="3810000" cy="171450"/>
+          </a:xfrm>
+          <a:prstGeom xmlns:a="http://schemas.openxmlformats.org/drawingml/2006/main" prst="rect">
+            <a:avLst/>
+          </a:prstGeom>
+          <a:noFill xmlns:a="http://schemas.openxmlformats.org/drawingml/2006/main"/>
+          <a:ln xmlns:a="http://schemas.openxmlformats.org/drawingml/2006/main" w="0">
+            <a:noFill/>
+          </a:ln>
+        </p:spPr>
+        <p:txBody>
+          <a:bodyPr xmlns:a="http://schemas.openxmlformats.org/drawingml/2006/main">
+            <a:noAutofit/>
+          </a:bodyPr>
+          <a:lstStyle xmlns:a="http://schemas.openxmlformats.org/drawingml/2006/main"/>
+          <a:p xmlns:a="http://schemas.openxmlformats.org/drawingml/2006/main">
+            <a:pPr>
+              <a:defRPr sz="900">
+                <a:solidFill>
+                  <a:srgbClr val="526571"/>
+                </a:solidFill>
+                <a:latin typeface="Arial"/>
+                <a:ea typeface="Arial"/>
+                <a:cs typeface="Arial"/>
+              </a:defRPr>
+            </a:pPr>
+            <a:r>
+              <a:rPr sz="900">
+                <a:solidFill>
+                  <a:srgbClr val="526571"/>
+                </a:solidFill>
+                <a:latin typeface="Arial"/>
+                <a:ea typeface="Arial"/>
+                <a:cs typeface="Arial"/>
+              </a:rPr>
+              <a:t>AI-generated concept image</a:t>
             </a:r>
           </a:p>
         </p:txBody>
@@ -3738,6 +3995,7 @@
           <a:lstStyle xmlns:a="http://schemas.openxmlformats.org/drawingml/2006/main"/>
           <a:p xmlns:a="http://schemas.openxmlformats.org/drawingml/2006/main">
             <a:pPr>
+              <a:buNone/>
               <a:defRPr sz="1200" b="1">
                 <a:solidFill>
                   <a:srgbClr val="2F6079"/>
@@ -3795,6 +4053,7 @@
           <a:lstStyle xmlns:a="http://schemas.openxmlformats.org/drawingml/2006/main"/>
           <a:p xmlns:a="http://schemas.openxmlformats.org/drawingml/2006/main">
             <a:pPr>
+              <a:buNone/>
               <a:defRPr sz="1050" b="0">
                 <a:solidFill>
                   <a:srgbClr val="526571"/>
@@ -3852,6 +4111,7 @@
           <a:lstStyle xmlns:a="http://schemas.openxmlformats.org/drawingml/2006/main"/>
           <a:p xmlns:a="http://schemas.openxmlformats.org/drawingml/2006/main">
             <a:pPr>
+              <a:buNone/>
               <a:defRPr sz="1125" b="1">
                 <a:solidFill>
                   <a:srgbClr val="2F6079"/>
@@ -3909,6 +4169,7 @@
           <a:lstStyle xmlns:a="http://schemas.openxmlformats.org/drawingml/2006/main"/>
           <a:p xmlns:a="http://schemas.openxmlformats.org/drawingml/2006/main">
             <a:pPr>
+              <a:buNone/>
               <a:defRPr sz="2850" b="1">
                 <a:solidFill>
                   <a:srgbClr val="18303F"/>
@@ -3966,6 +4227,7 @@
           <a:lstStyle xmlns:a="http://schemas.openxmlformats.org/drawingml/2006/main"/>
           <a:p xmlns:a="http://schemas.openxmlformats.org/drawingml/2006/main">
             <a:pPr>
+              <a:buNone/>
               <a:defRPr sz="1875" b="0">
                 <a:solidFill>
                   <a:srgbClr val="18303F"/>
@@ -3994,6 +4256,7 @@
           </a:p>
           <a:p xmlns:a="http://schemas.openxmlformats.org/drawingml/2006/main">
             <a:pPr>
+              <a:buNone/>
               <a:defRPr sz="1875" b="0">
                 <a:solidFill>
                   <a:srgbClr val="18303F"/>
@@ -4033,8 +4296,8 @@
         </p:nvSpPr>
         <p:spPr>
           <a:xfrm xmlns:a="http://schemas.openxmlformats.org/drawingml/2006/main">
-            <a:off x="5810250" y="1962150"/>
-            <a:ext cx="5857875" cy="3238500"/>
+            <a:off x="5810250" y="1714500"/>
+            <a:ext cx="5857875" cy="2876550"/>
           </a:xfrm>
           <a:prstGeom xmlns:a="http://schemas.openxmlformats.org/drawingml/2006/main" prst="rect">
             <a:avLst/>
@@ -4049,20 +4312,21 @@
       </p:sp>
       <p:pic>
         <p:nvPicPr>
-          <p:cNvPr id="18" name=""/>
+          <p:cNvPr id="22" name=""/>
           <p:cNvPicPr>
             <a:picLocks xmlns:a="http://schemas.openxmlformats.org/drawingml/2006/main" noChangeAspect="1"/>
           </p:cNvPicPr>
           <p:nvPr/>
         </p:nvPicPr>
         <p:blipFill>
-          <a:blip xmlns:r="http://schemas.openxmlformats.org/officeDocument/2006/relationships" xmlns:a="http://schemas.openxmlformats.org/drawingml/2006/main" r:embed="R2695f2161a734fcb"/>
+          <a:blip xmlns:r="http://schemas.openxmlformats.org/officeDocument/2006/relationships" xmlns:a="http://schemas.openxmlformats.org/drawingml/2006/main" r:embed="R6e7f59cdea4343eb"/>
+          <a:srcRect xmlns:a="http://schemas.openxmlformats.org/drawingml/2006/main" l="0" t="0" r="0" b="0"/>
           <a:stretch xmlns:a="http://schemas.openxmlformats.org/drawingml/2006/main"/>
         </p:blipFill>
         <p:spPr>
           <a:xfrm xmlns:a="http://schemas.openxmlformats.org/drawingml/2006/main">
-            <a:off x="5995988" y="2038350"/>
-            <a:ext cx="5486400" cy="3086100"/>
+            <a:off x="6317721" y="1790700"/>
+            <a:ext cx="4842933" cy="2724150"/>
           </a:xfrm>
           <a:prstGeom xmlns:a="http://schemas.openxmlformats.org/drawingml/2006/main" prst="rect">
             <a:avLst/>
@@ -4085,8 +4349,8 @@
         </p:nvSpPr>
         <p:spPr>
           <a:xfrm xmlns:a="http://schemas.openxmlformats.org/drawingml/2006/main">
-            <a:off x="5838825" y="5324475"/>
-            <a:ext cx="5810250" cy="600075"/>
+            <a:off x="8096250" y="4819650"/>
+            <a:ext cx="3571875" cy="1257300"/>
           </a:xfrm>
           <a:prstGeom xmlns:a="http://schemas.openxmlformats.org/drawingml/2006/main" prst="rect">
             <a:avLst/>
@@ -4103,9 +4367,10 @@
           <a:lstStyle xmlns:a="http://schemas.openxmlformats.org/drawingml/2006/main"/>
           <a:p xmlns:a="http://schemas.openxmlformats.org/drawingml/2006/main">
             <a:pPr>
+              <a:buNone/>
               <a:defRPr sz="1125" b="0">
                 <a:solidFill>
-                  <a:srgbClr val="526571"/>
+                  <a:srgbClr val="18303F"/>
                 </a:solidFill>
                 <a:latin typeface="Arial"/>
                 <a:ea typeface="Arial"/>
@@ -4115,7 +4380,7 @@
             <a:r>
               <a:rPr sz="1125" b="0">
                 <a:solidFill>
-                  <a:srgbClr val="526571"/>
+                  <a:srgbClr val="18303F"/>
                 </a:solidFill>
                 <a:latin typeface="Arial"/>
                 <a:ea typeface="Arial"/>
@@ -4160,6 +4425,7 @@
           <a:lstStyle xmlns:a="http://schemas.openxmlformats.org/drawingml/2006/main"/>
           <a:p xmlns:a="http://schemas.openxmlformats.org/drawingml/2006/main">
             <a:pPr>
+              <a:buNone/>
               <a:defRPr sz="1725" b="1">
                 <a:solidFill>
                   <a:srgbClr val="2F6079"/>
@@ -4179,6 +4445,85 @@
                 <a:cs typeface="Arial"/>
               </a:rPr>
               <a:t>What extra observation would strengthen a judgement based on this photograph?</a:t>
+            </a:r>
+          </a:p>
+        </p:txBody>
+      </p:sp>
+      <p:pic>
+        <p:nvPicPr>
+          <p:cNvPr id="25" name=""/>
+          <p:cNvPicPr>
+            <a:picLocks xmlns:a="http://schemas.openxmlformats.org/drawingml/2006/main" noChangeAspect="1"/>
+          </p:cNvPicPr>
+          <p:nvPr/>
+        </p:nvPicPr>
+        <p:blipFill>
+          <a:blip xmlns:r="http://schemas.openxmlformats.org/officeDocument/2006/relationships" xmlns:a="http://schemas.openxmlformats.org/drawingml/2006/main" r:embed="Rc45c17ecf64a476f"/>
+          <a:stretch xmlns:a="http://schemas.openxmlformats.org/drawingml/2006/main"/>
+        </p:blipFill>
+        <p:spPr>
+          <a:xfrm xmlns:a="http://schemas.openxmlformats.org/drawingml/2006/main">
+            <a:off x="5828176" y="4762500"/>
+            <a:ext cx="2012022" cy="1343025"/>
+          </a:xfrm>
+          <a:prstGeom xmlns:a="http://schemas.openxmlformats.org/drawingml/2006/main" prst="rect">
+            <a:avLst/>
+          </a:prstGeom>
+        </p:spPr>
+      </p:pic>
+      <p:sp>
+        <p:nvSpPr>
+          <p:cNvPr id="14" name="">
+            <a:extLst xmlns:a="http://schemas.openxmlformats.org/drawingml/2006/main">
+              <a:ext uri="{FF2B5EF4-FFF2-40B4-BE49-F238E27FC236}">
+                <a16:creationId xmlns:a16="http://schemas.microsoft.com/office/drawing/2014/main" id="{2FCF50A4-E487-478C-B956-048DC6DC8BB5}"/>
+              </a:ext>
+            </a:extLst>
+          </p:cNvPr>
+          <p:cNvSpPr>
+            <a:spLocks xmlns:a="http://schemas.openxmlformats.org/drawingml/2006/main" noGrp="1"/>
+          </p:cNvSpPr>
+          <p:nvPr/>
+        </p:nvSpPr>
+        <p:spPr>
+          <a:xfrm xmlns:a="http://schemas.openxmlformats.org/drawingml/2006/main">
+            <a:off x="5810250" y="6115050"/>
+            <a:ext cx="2286000" cy="171450"/>
+          </a:xfrm>
+          <a:prstGeom xmlns:a="http://schemas.openxmlformats.org/drawingml/2006/main" prst="rect">
+            <a:avLst/>
+          </a:prstGeom>
+          <a:noFill xmlns:a="http://schemas.openxmlformats.org/drawingml/2006/main"/>
+          <a:ln xmlns:a="http://schemas.openxmlformats.org/drawingml/2006/main" w="0">
+            <a:noFill/>
+          </a:ln>
+        </p:spPr>
+        <p:txBody>
+          <a:bodyPr xmlns:a="http://schemas.openxmlformats.org/drawingml/2006/main">
+            <a:noAutofit/>
+          </a:bodyPr>
+          <a:lstStyle xmlns:a="http://schemas.openxmlformats.org/drawingml/2006/main"/>
+          <a:p xmlns:a="http://schemas.openxmlformats.org/drawingml/2006/main">
+            <a:pPr>
+              <a:defRPr sz="900">
+                <a:solidFill>
+                  <a:srgbClr val="526571"/>
+                </a:solidFill>
+                <a:latin typeface="Arial"/>
+                <a:ea typeface="Arial"/>
+                <a:cs typeface="Arial"/>
+              </a:defRPr>
+            </a:pPr>
+            <a:r>
+              <a:rPr sz="900">
+                <a:solidFill>
+                  <a:srgbClr val="526571"/>
+                </a:solidFill>
+                <a:latin typeface="Arial"/>
+                <a:ea typeface="Arial"/>
+                <a:cs typeface="Arial"/>
+              </a:rPr>
+              <a:t>AI-generated concept image</a:t>
             </a:r>
           </a:p>
         </p:txBody>
@@ -4276,6 +4621,7 @@
           <a:lstStyle xmlns:a="http://schemas.openxmlformats.org/drawingml/2006/main"/>
           <a:p xmlns:a="http://schemas.openxmlformats.org/drawingml/2006/main">
             <a:pPr>
+              <a:buNone/>
               <a:defRPr sz="1200" b="1">
                 <a:solidFill>
                   <a:srgbClr val="2F6079"/>
@@ -4333,6 +4679,7 @@
           <a:lstStyle xmlns:a="http://schemas.openxmlformats.org/drawingml/2006/main"/>
           <a:p xmlns:a="http://schemas.openxmlformats.org/drawingml/2006/main">
             <a:pPr>
+              <a:buNone/>
               <a:defRPr sz="1050" b="0">
                 <a:solidFill>
                   <a:srgbClr val="526571"/>
@@ -4390,6 +4737,7 @@
           <a:lstStyle xmlns:a="http://schemas.openxmlformats.org/drawingml/2006/main"/>
           <a:p xmlns:a="http://schemas.openxmlformats.org/drawingml/2006/main">
             <a:pPr>
+              <a:buNone/>
               <a:defRPr sz="1125" b="1">
                 <a:solidFill>
                   <a:srgbClr val="2F6079"/>
@@ -4447,6 +4795,7 @@
           <a:lstStyle xmlns:a="http://schemas.openxmlformats.org/drawingml/2006/main"/>
           <a:p xmlns:a="http://schemas.openxmlformats.org/drawingml/2006/main">
             <a:pPr>
+              <a:buNone/>
               <a:defRPr sz="2850" b="1">
                 <a:solidFill>
                   <a:srgbClr val="18303F"/>
@@ -4504,6 +4853,7 @@
           <a:lstStyle xmlns:a="http://schemas.openxmlformats.org/drawingml/2006/main"/>
           <a:p xmlns:a="http://schemas.openxmlformats.org/drawingml/2006/main">
             <a:pPr>
+              <a:buNone/>
               <a:defRPr sz="1875" b="0">
                 <a:solidFill>
                   <a:srgbClr val="18303F"/>
@@ -4532,6 +4882,7 @@
           </a:p>
           <a:p xmlns:a="http://schemas.openxmlformats.org/drawingml/2006/main">
             <a:pPr>
+              <a:buNone/>
               <a:defRPr sz="1875" b="0">
                 <a:solidFill>
                   <a:srgbClr val="18303F"/>
@@ -4571,8 +4922,8 @@
         </p:nvSpPr>
         <p:spPr>
           <a:xfrm xmlns:a="http://schemas.openxmlformats.org/drawingml/2006/main">
-            <a:off x="5810250" y="1962150"/>
-            <a:ext cx="5857875" cy="3238500"/>
+            <a:off x="5810250" y="1714500"/>
+            <a:ext cx="5857875" cy="2876550"/>
           </a:xfrm>
           <a:prstGeom xmlns:a="http://schemas.openxmlformats.org/drawingml/2006/main" prst="rect">
             <a:avLst/>
@@ -4587,20 +4938,21 @@
       </p:sp>
       <p:pic>
         <p:nvPicPr>
-          <p:cNvPr id="18" name=""/>
+          <p:cNvPr id="22" name=""/>
           <p:cNvPicPr>
             <a:picLocks xmlns:a="http://schemas.openxmlformats.org/drawingml/2006/main" noChangeAspect="1"/>
           </p:cNvPicPr>
           <p:nvPr/>
         </p:nvPicPr>
         <p:blipFill>
-          <a:blip xmlns:r="http://schemas.openxmlformats.org/officeDocument/2006/relationships" xmlns:a="http://schemas.openxmlformats.org/drawingml/2006/main" r:embed="R3d7dcd14b49b441e"/>
+          <a:blip xmlns:r="http://schemas.openxmlformats.org/officeDocument/2006/relationships" xmlns:a="http://schemas.openxmlformats.org/drawingml/2006/main" r:embed="R762c30971fd94c11"/>
+          <a:srcRect xmlns:a="http://schemas.openxmlformats.org/drawingml/2006/main" l="0" t="0" r="0" b="0"/>
           <a:stretch xmlns:a="http://schemas.openxmlformats.org/drawingml/2006/main"/>
         </p:blipFill>
         <p:spPr>
           <a:xfrm xmlns:a="http://schemas.openxmlformats.org/drawingml/2006/main">
-            <a:off x="5997689" y="2038350"/>
-            <a:ext cx="5482997" cy="3086100"/>
+            <a:off x="6319234" y="1790700"/>
+            <a:ext cx="4839907" cy="2724150"/>
           </a:xfrm>
           <a:prstGeom xmlns:a="http://schemas.openxmlformats.org/drawingml/2006/main" prst="rect">
             <a:avLst/>
@@ -4623,8 +4975,8 @@
         </p:nvSpPr>
         <p:spPr>
           <a:xfrm xmlns:a="http://schemas.openxmlformats.org/drawingml/2006/main">
-            <a:off x="5838825" y="5324475"/>
-            <a:ext cx="5810250" cy="600075"/>
+            <a:off x="8096250" y="4819650"/>
+            <a:ext cx="3571875" cy="1257300"/>
           </a:xfrm>
           <a:prstGeom xmlns:a="http://schemas.openxmlformats.org/drawingml/2006/main" prst="rect">
             <a:avLst/>
@@ -4641,9 +4993,10 @@
           <a:lstStyle xmlns:a="http://schemas.openxmlformats.org/drawingml/2006/main"/>
           <a:p xmlns:a="http://schemas.openxmlformats.org/drawingml/2006/main">
             <a:pPr>
+              <a:buNone/>
               <a:defRPr sz="1125" b="0">
                 <a:solidFill>
-                  <a:srgbClr val="526571"/>
+                  <a:srgbClr val="18303F"/>
                 </a:solidFill>
                 <a:latin typeface="Arial"/>
                 <a:ea typeface="Arial"/>
@@ -4653,7 +5006,7 @@
             <a:r>
               <a:rPr sz="1125" b="0">
                 <a:solidFill>
-                  <a:srgbClr val="526571"/>
+                  <a:srgbClr val="18303F"/>
                 </a:solidFill>
                 <a:latin typeface="Arial"/>
                 <a:ea typeface="Arial"/>
@@ -4698,6 +5051,7 @@
           <a:lstStyle xmlns:a="http://schemas.openxmlformats.org/drawingml/2006/main"/>
           <a:p xmlns:a="http://schemas.openxmlformats.org/drawingml/2006/main">
             <a:pPr>
+              <a:buNone/>
               <a:defRPr sz="1725" b="1">
                 <a:solidFill>
                   <a:srgbClr val="2F6079"/>
@@ -4717,6 +5071,85 @@
                 <a:cs typeface="Arial"/>
               </a:rPr>
               <a:t>Write one observation and one possible explanation without confusing them.</a:t>
+            </a:r>
+          </a:p>
+        </p:txBody>
+      </p:sp>
+      <p:pic>
+        <p:nvPicPr>
+          <p:cNvPr id="25" name=""/>
+          <p:cNvPicPr>
+            <a:picLocks xmlns:a="http://schemas.openxmlformats.org/drawingml/2006/main" noChangeAspect="1"/>
+          </p:cNvPicPr>
+          <p:nvPr/>
+        </p:nvPicPr>
+        <p:blipFill>
+          <a:blip xmlns:r="http://schemas.openxmlformats.org/officeDocument/2006/relationships" xmlns:a="http://schemas.openxmlformats.org/drawingml/2006/main" r:embed="R02e305742faf44a0"/>
+          <a:stretch xmlns:a="http://schemas.openxmlformats.org/drawingml/2006/main"/>
+        </p:blipFill>
+        <p:spPr>
+          <a:xfrm xmlns:a="http://schemas.openxmlformats.org/drawingml/2006/main">
+            <a:off x="5826919" y="4762500"/>
+            <a:ext cx="2014538" cy="1343025"/>
+          </a:xfrm>
+          <a:prstGeom xmlns:a="http://schemas.openxmlformats.org/drawingml/2006/main" prst="rect">
+            <a:avLst/>
+          </a:prstGeom>
+        </p:spPr>
+      </p:pic>
+      <p:sp>
+        <p:nvSpPr>
+          <p:cNvPr id="14" name="">
+            <a:extLst xmlns:a="http://schemas.openxmlformats.org/drawingml/2006/main">
+              <a:ext uri="{FF2B5EF4-FFF2-40B4-BE49-F238E27FC236}">
+                <a16:creationId xmlns:a16="http://schemas.microsoft.com/office/drawing/2014/main" id="{8E8C11E5-7DF1-46DF-A340-162FA3E6402F}"/>
+              </a:ext>
+            </a:extLst>
+          </p:cNvPr>
+          <p:cNvSpPr>
+            <a:spLocks xmlns:a="http://schemas.openxmlformats.org/drawingml/2006/main" noGrp="1"/>
+          </p:cNvSpPr>
+          <p:nvPr/>
+        </p:nvSpPr>
+        <p:spPr>
+          <a:xfrm xmlns:a="http://schemas.openxmlformats.org/drawingml/2006/main">
+            <a:off x="5810250" y="6115050"/>
+            <a:ext cx="2286000" cy="171450"/>
+          </a:xfrm>
+          <a:prstGeom xmlns:a="http://schemas.openxmlformats.org/drawingml/2006/main" prst="rect">
+            <a:avLst/>
+          </a:prstGeom>
+          <a:noFill xmlns:a="http://schemas.openxmlformats.org/drawingml/2006/main"/>
+          <a:ln xmlns:a="http://schemas.openxmlformats.org/drawingml/2006/main" w="0">
+            <a:noFill/>
+          </a:ln>
+        </p:spPr>
+        <p:txBody>
+          <a:bodyPr xmlns:a="http://schemas.openxmlformats.org/drawingml/2006/main">
+            <a:noAutofit/>
+          </a:bodyPr>
+          <a:lstStyle xmlns:a="http://schemas.openxmlformats.org/drawingml/2006/main"/>
+          <a:p xmlns:a="http://schemas.openxmlformats.org/drawingml/2006/main">
+            <a:pPr>
+              <a:defRPr sz="900">
+                <a:solidFill>
+                  <a:srgbClr val="526571"/>
+                </a:solidFill>
+                <a:latin typeface="Arial"/>
+                <a:ea typeface="Arial"/>
+                <a:cs typeface="Arial"/>
+              </a:defRPr>
+            </a:pPr>
+            <a:r>
+              <a:rPr sz="900">
+                <a:solidFill>
+                  <a:srgbClr val="526571"/>
+                </a:solidFill>
+                <a:latin typeface="Arial"/>
+                <a:ea typeface="Arial"/>
+                <a:cs typeface="Arial"/>
+              </a:rPr>
+              <a:t>AI-generated concept image</a:t>
             </a:r>
           </a:p>
         </p:txBody>
@@ -4814,6 +5247,7 @@
           <a:lstStyle xmlns:a="http://schemas.openxmlformats.org/drawingml/2006/main"/>
           <a:p xmlns:a="http://schemas.openxmlformats.org/drawingml/2006/main">
             <a:pPr>
+              <a:buNone/>
               <a:defRPr sz="1200" b="1">
                 <a:solidFill>
                   <a:srgbClr val="2F6079"/>
@@ -4871,6 +5305,7 @@
           <a:lstStyle xmlns:a="http://schemas.openxmlformats.org/drawingml/2006/main"/>
           <a:p xmlns:a="http://schemas.openxmlformats.org/drawingml/2006/main">
             <a:pPr>
+              <a:buNone/>
               <a:defRPr sz="1050" b="0">
                 <a:solidFill>
                   <a:srgbClr val="526571"/>
@@ -4928,6 +5363,7 @@
           <a:lstStyle xmlns:a="http://schemas.openxmlformats.org/drawingml/2006/main"/>
           <a:p xmlns:a="http://schemas.openxmlformats.org/drawingml/2006/main">
             <a:pPr>
+              <a:buNone/>
               <a:defRPr sz="1125" b="1">
                 <a:solidFill>
                   <a:srgbClr val="2F6079"/>
@@ -4985,6 +5421,7 @@
           <a:lstStyle xmlns:a="http://schemas.openxmlformats.org/drawingml/2006/main"/>
           <a:p xmlns:a="http://schemas.openxmlformats.org/drawingml/2006/main">
             <a:pPr>
+              <a:buNone/>
               <a:defRPr sz="2850" b="1">
                 <a:solidFill>
                   <a:srgbClr val="18303F"/>
@@ -5042,6 +5479,7 @@
           <a:lstStyle xmlns:a="http://schemas.openxmlformats.org/drawingml/2006/main"/>
           <a:p xmlns:a="http://schemas.openxmlformats.org/drawingml/2006/main">
             <a:pPr>
+              <a:buNone/>
               <a:defRPr sz="1875" b="0">
                 <a:solidFill>
                   <a:srgbClr val="18303F"/>
@@ -5070,6 +5508,7 @@
           </a:p>
           <a:p xmlns:a="http://schemas.openxmlformats.org/drawingml/2006/main">
             <a:pPr>
+              <a:buNone/>
               <a:defRPr sz="1875" b="0">
                 <a:solidFill>
                   <a:srgbClr val="18303F"/>
@@ -5109,8 +5548,8 @@
         </p:nvSpPr>
         <p:spPr>
           <a:xfrm xmlns:a="http://schemas.openxmlformats.org/drawingml/2006/main">
-            <a:off x="5810250" y="1962150"/>
-            <a:ext cx="5857875" cy="3238500"/>
+            <a:off x="5810250" y="1714500"/>
+            <a:ext cx="5857875" cy="2876550"/>
           </a:xfrm>
           <a:prstGeom xmlns:a="http://schemas.openxmlformats.org/drawingml/2006/main" prst="rect">
             <a:avLst/>
@@ -5125,20 +5564,21 @@
       </p:sp>
       <p:pic>
         <p:nvPicPr>
-          <p:cNvPr id="18" name=""/>
+          <p:cNvPr id="22" name=""/>
           <p:cNvPicPr>
             <a:picLocks xmlns:a="http://schemas.openxmlformats.org/drawingml/2006/main" noChangeAspect="1"/>
           </p:cNvPicPr>
           <p:nvPr/>
         </p:nvPicPr>
         <p:blipFill>
-          <a:blip xmlns:r="http://schemas.openxmlformats.org/officeDocument/2006/relationships" xmlns:a="http://schemas.openxmlformats.org/drawingml/2006/main" r:embed="Rba4d14d61a314140"/>
+          <a:blip xmlns:r="http://schemas.openxmlformats.org/officeDocument/2006/relationships" xmlns:a="http://schemas.openxmlformats.org/drawingml/2006/main" r:embed="R3cb34ab5a20a46fa"/>
+          <a:srcRect xmlns:a="http://schemas.openxmlformats.org/drawingml/2006/main" l="0" t="0" r="0" b="0"/>
           <a:stretch xmlns:a="http://schemas.openxmlformats.org/drawingml/2006/main"/>
         </p:blipFill>
         <p:spPr>
           <a:xfrm xmlns:a="http://schemas.openxmlformats.org/drawingml/2006/main">
-            <a:off x="7196138" y="2038350"/>
-            <a:ext cx="3086100" cy="3086100"/>
+            <a:off x="7377113" y="1790700"/>
+            <a:ext cx="2724150" cy="2724150"/>
           </a:xfrm>
           <a:prstGeom xmlns:a="http://schemas.openxmlformats.org/drawingml/2006/main" prst="rect">
             <a:avLst/>
@@ -5161,8 +5601,8 @@
         </p:nvSpPr>
         <p:spPr>
           <a:xfrm xmlns:a="http://schemas.openxmlformats.org/drawingml/2006/main">
-            <a:off x="5838825" y="5324475"/>
-            <a:ext cx="5810250" cy="600075"/>
+            <a:off x="8096250" y="4819650"/>
+            <a:ext cx="3571875" cy="1257300"/>
           </a:xfrm>
           <a:prstGeom xmlns:a="http://schemas.openxmlformats.org/drawingml/2006/main" prst="rect">
             <a:avLst/>
@@ -5179,9 +5619,10 @@
           <a:lstStyle xmlns:a="http://schemas.openxmlformats.org/drawingml/2006/main"/>
           <a:p xmlns:a="http://schemas.openxmlformats.org/drawingml/2006/main">
             <a:pPr>
+              <a:buNone/>
               <a:defRPr sz="1125" b="0">
                 <a:solidFill>
-                  <a:srgbClr val="526571"/>
+                  <a:srgbClr val="18303F"/>
                 </a:solidFill>
                 <a:latin typeface="Arial"/>
                 <a:ea typeface="Arial"/>
@@ -5191,7 +5632,7 @@
             <a:r>
               <a:rPr sz="1125" b="0">
                 <a:solidFill>
-                  <a:srgbClr val="526571"/>
+                  <a:srgbClr val="18303F"/>
                 </a:solidFill>
                 <a:latin typeface="Arial"/>
                 <a:ea typeface="Arial"/>
@@ -5236,6 +5677,7 @@
           <a:lstStyle xmlns:a="http://schemas.openxmlformats.org/drawingml/2006/main"/>
           <a:p xmlns:a="http://schemas.openxmlformats.org/drawingml/2006/main">
             <a:pPr>
+              <a:buNone/>
               <a:defRPr sz="1725" b="1">
                 <a:solidFill>
                   <a:srgbClr val="2F6079"/>
@@ -5255,6 +5697,85 @@
                 <a:cs typeface="Arial"/>
               </a:rPr>
               <a:t>Which two pieces of evidence best support your proposed improvement?</a:t>
+            </a:r>
+          </a:p>
+        </p:txBody>
+      </p:sp>
+      <p:pic>
+        <p:nvPicPr>
+          <p:cNvPr id="25" name=""/>
+          <p:cNvPicPr>
+            <a:picLocks xmlns:a="http://schemas.openxmlformats.org/drawingml/2006/main" noChangeAspect="1"/>
+          </p:cNvPicPr>
+          <p:nvPr/>
+        </p:nvPicPr>
+        <p:blipFill>
+          <a:blip xmlns:r="http://schemas.openxmlformats.org/officeDocument/2006/relationships" xmlns:a="http://schemas.openxmlformats.org/drawingml/2006/main" r:embed="Ra16998d1bd26468f"/>
+          <a:stretch xmlns:a="http://schemas.openxmlformats.org/drawingml/2006/main"/>
+        </p:blipFill>
+        <p:spPr>
+          <a:xfrm xmlns:a="http://schemas.openxmlformats.org/drawingml/2006/main">
+            <a:off x="5826919" y="4762500"/>
+            <a:ext cx="2014538" cy="1343025"/>
+          </a:xfrm>
+          <a:prstGeom xmlns:a="http://schemas.openxmlformats.org/drawingml/2006/main" prst="rect">
+            <a:avLst/>
+          </a:prstGeom>
+        </p:spPr>
+      </p:pic>
+      <p:sp>
+        <p:nvSpPr>
+          <p:cNvPr id="14" name="">
+            <a:extLst xmlns:a="http://schemas.openxmlformats.org/drawingml/2006/main">
+              <a:ext uri="{FF2B5EF4-FFF2-40B4-BE49-F238E27FC236}">
+                <a16:creationId xmlns:a16="http://schemas.microsoft.com/office/drawing/2014/main" id="{E7E58944-D8BC-4C7D-83F4-67A6BD880A37}"/>
+              </a:ext>
+            </a:extLst>
+          </p:cNvPr>
+          <p:cNvSpPr>
+            <a:spLocks xmlns:a="http://schemas.openxmlformats.org/drawingml/2006/main" noGrp="1"/>
+          </p:cNvSpPr>
+          <p:nvPr/>
+        </p:nvSpPr>
+        <p:spPr>
+          <a:xfrm xmlns:a="http://schemas.openxmlformats.org/drawingml/2006/main">
+            <a:off x="5810250" y="6115050"/>
+            <a:ext cx="2286000" cy="171450"/>
+          </a:xfrm>
+          <a:prstGeom xmlns:a="http://schemas.openxmlformats.org/drawingml/2006/main" prst="rect">
+            <a:avLst/>
+          </a:prstGeom>
+          <a:noFill xmlns:a="http://schemas.openxmlformats.org/drawingml/2006/main"/>
+          <a:ln xmlns:a="http://schemas.openxmlformats.org/drawingml/2006/main" w="0">
+            <a:noFill/>
+          </a:ln>
+        </p:spPr>
+        <p:txBody>
+          <a:bodyPr xmlns:a="http://schemas.openxmlformats.org/drawingml/2006/main">
+            <a:noAutofit/>
+          </a:bodyPr>
+          <a:lstStyle xmlns:a="http://schemas.openxmlformats.org/drawingml/2006/main"/>
+          <a:p xmlns:a="http://schemas.openxmlformats.org/drawingml/2006/main">
+            <a:pPr>
+              <a:defRPr sz="900">
+                <a:solidFill>
+                  <a:srgbClr val="526571"/>
+                </a:solidFill>
+                <a:latin typeface="Arial"/>
+                <a:ea typeface="Arial"/>
+                <a:cs typeface="Arial"/>
+              </a:defRPr>
+            </a:pPr>
+            <a:r>
+              <a:rPr sz="900">
+                <a:solidFill>
+                  <a:srgbClr val="526571"/>
+                </a:solidFill>
+                <a:latin typeface="Arial"/>
+                <a:ea typeface="Arial"/>
+                <a:cs typeface="Arial"/>
+              </a:rPr>
+              <a:t>AI-generated concept image</a:t>
             </a:r>
           </a:p>
         </p:txBody>
@@ -5352,6 +5873,7 @@
           <a:lstStyle xmlns:a="http://schemas.openxmlformats.org/drawingml/2006/main"/>
           <a:p xmlns:a="http://schemas.openxmlformats.org/drawingml/2006/main">
             <a:pPr>
+              <a:buNone/>
               <a:defRPr sz="1200" b="1">
                 <a:solidFill>
                   <a:srgbClr val="2F6079"/>
@@ -5409,6 +5931,7 @@
           <a:lstStyle xmlns:a="http://schemas.openxmlformats.org/drawingml/2006/main"/>
           <a:p xmlns:a="http://schemas.openxmlformats.org/drawingml/2006/main">
             <a:pPr>
+              <a:buNone/>
               <a:defRPr sz="1050" b="0">
                 <a:solidFill>
                   <a:srgbClr val="526571"/>
@@ -5466,6 +5989,7 @@
           <a:lstStyle xmlns:a="http://schemas.openxmlformats.org/drawingml/2006/main"/>
           <a:p xmlns:a="http://schemas.openxmlformats.org/drawingml/2006/main">
             <a:pPr>
+              <a:buNone/>
               <a:defRPr sz="1125" b="1">
                 <a:solidFill>
                   <a:srgbClr val="2F6079"/>
@@ -5523,6 +6047,7 @@
           <a:lstStyle xmlns:a="http://schemas.openxmlformats.org/drawingml/2006/main"/>
           <a:p xmlns:a="http://schemas.openxmlformats.org/drawingml/2006/main">
             <a:pPr>
+              <a:buNone/>
               <a:defRPr sz="3225" b="1">
                 <a:solidFill>
                   <a:srgbClr val="18303F"/>
@@ -5580,6 +6105,7 @@
           <a:lstStyle xmlns:a="http://schemas.openxmlformats.org/drawingml/2006/main"/>
           <a:p xmlns:a="http://schemas.openxmlformats.org/drawingml/2006/main">
             <a:pPr>
+              <a:buNone/>
               <a:defRPr sz="2400" b="1">
                 <a:solidFill>
                   <a:srgbClr val="2F6079"/>
@@ -5620,7 +6146,7 @@
         <p:spPr>
           <a:xfrm xmlns:a="http://schemas.openxmlformats.org/drawingml/2006/main">
             <a:off x="1352550" y="2124075"/>
-            <a:ext cx="10096500" cy="914400"/>
+            <a:ext cx="5619750" cy="1143000"/>
           </a:xfrm>
           <a:prstGeom xmlns:a="http://schemas.openxmlformats.org/drawingml/2006/main" prst="rect">
             <a:avLst/>
@@ -5637,7 +6163,8 @@
           <a:lstStyle xmlns:a="http://schemas.openxmlformats.org/drawingml/2006/main"/>
           <a:p xmlns:a="http://schemas.openxmlformats.org/drawingml/2006/main">
             <a:pPr>
-              <a:defRPr sz="2100" b="0">
+              <a:buNone/>
+              <a:defRPr sz="2025" b="0">
                 <a:solidFill>
                   <a:srgbClr val="18303F"/>
                 </a:solidFill>
@@ -5647,7 +6174,7 @@
               </a:defRPr>
             </a:pPr>
             <a:r>
-              <a:rPr sz="2100" b="0">
+              <a:rPr sz="2025" b="0">
                 <a:solidFill>
                   <a:srgbClr val="18303F"/>
                 </a:solidFill>
@@ -5694,6 +6221,7 @@
           <a:lstStyle xmlns:a="http://schemas.openxmlformats.org/drawingml/2006/main"/>
           <a:p xmlns:a="http://schemas.openxmlformats.org/drawingml/2006/main">
             <a:pPr>
+              <a:buNone/>
               <a:defRPr sz="2400" b="1">
                 <a:solidFill>
                   <a:srgbClr val="2F6079"/>
@@ -5734,7 +6262,7 @@
         <p:spPr>
           <a:xfrm xmlns:a="http://schemas.openxmlformats.org/drawingml/2006/main">
             <a:off x="1352550" y="3276600"/>
-            <a:ext cx="10096500" cy="914400"/>
+            <a:ext cx="5619750" cy="1143000"/>
           </a:xfrm>
           <a:prstGeom xmlns:a="http://schemas.openxmlformats.org/drawingml/2006/main" prst="rect">
             <a:avLst/>
@@ -5751,7 +6279,8 @@
           <a:lstStyle xmlns:a="http://schemas.openxmlformats.org/drawingml/2006/main"/>
           <a:p xmlns:a="http://schemas.openxmlformats.org/drawingml/2006/main">
             <a:pPr>
-              <a:defRPr sz="2100" b="0">
+              <a:buNone/>
+              <a:defRPr sz="2025" b="0">
                 <a:solidFill>
                   <a:srgbClr val="18303F"/>
                 </a:solidFill>
@@ -5761,7 +6290,7 @@
               </a:defRPr>
             </a:pPr>
             <a:r>
-              <a:rPr sz="2100" b="0">
+              <a:rPr sz="2025" b="0">
                 <a:solidFill>
                   <a:srgbClr val="18303F"/>
                 </a:solidFill>
@@ -5808,6 +6337,7 @@
           <a:lstStyle xmlns:a="http://schemas.openxmlformats.org/drawingml/2006/main"/>
           <a:p xmlns:a="http://schemas.openxmlformats.org/drawingml/2006/main">
             <a:pPr>
+              <a:buNone/>
               <a:defRPr sz="2400" b="1">
                 <a:solidFill>
                   <a:srgbClr val="2F6079"/>
@@ -5848,7 +6378,7 @@
         <p:spPr>
           <a:xfrm xmlns:a="http://schemas.openxmlformats.org/drawingml/2006/main">
             <a:off x="1352550" y="4429125"/>
-            <a:ext cx="10096500" cy="914400"/>
+            <a:ext cx="5619750" cy="1143000"/>
           </a:xfrm>
           <a:prstGeom xmlns:a="http://schemas.openxmlformats.org/drawingml/2006/main" prst="rect">
             <a:avLst/>
@@ -5865,7 +6395,8 @@
           <a:lstStyle xmlns:a="http://schemas.openxmlformats.org/drawingml/2006/main"/>
           <a:p xmlns:a="http://schemas.openxmlformats.org/drawingml/2006/main">
             <a:pPr>
-              <a:defRPr sz="2100" b="0">
+              <a:buNone/>
+              <a:defRPr sz="2025" b="0">
                 <a:solidFill>
                   <a:srgbClr val="18303F"/>
                 </a:solidFill>
@@ -5875,7 +6406,7 @@
               </a:defRPr>
             </a:pPr>
             <a:r>
-              <a:rPr sz="2100" b="0">
+              <a:rPr sz="2025" b="0">
                 <a:solidFill>
                   <a:srgbClr val="18303F"/>
                 </a:solidFill>
@@ -5884,6 +6415,85 @@
                 <a:cs typeface="Arial"/>
               </a:rPr>
               <a:t>Which two pieces of evidence best support your proposed improvement?</a:t>
+            </a:r>
+          </a:p>
+        </p:txBody>
+      </p:sp>
+      <p:pic>
+        <p:nvPicPr>
+          <p:cNvPr id="26" name=""/>
+          <p:cNvPicPr>
+            <a:picLocks xmlns:a="http://schemas.openxmlformats.org/drawingml/2006/main" noChangeAspect="1"/>
+          </p:cNvPicPr>
+          <p:nvPr/>
+        </p:nvPicPr>
+        <p:blipFill>
+          <a:blip xmlns:r="http://schemas.openxmlformats.org/officeDocument/2006/relationships" xmlns:a="http://schemas.openxmlformats.org/drawingml/2006/main" r:embed="Ra8781e66f8cd4bcc"/>
+          <a:stretch xmlns:a="http://schemas.openxmlformats.org/drawingml/2006/main"/>
+        </p:blipFill>
+        <p:spPr>
+          <a:xfrm xmlns:a="http://schemas.openxmlformats.org/drawingml/2006/main">
+            <a:off x="7620000" y="2484438"/>
+            <a:ext cx="4048125" cy="2698750"/>
+          </a:xfrm>
+          <a:prstGeom xmlns:a="http://schemas.openxmlformats.org/drawingml/2006/main" prst="rect">
+            <a:avLst/>
+          </a:prstGeom>
+        </p:spPr>
+      </p:pic>
+      <p:sp>
+        <p:nvSpPr>
+          <p:cNvPr id="14" name="">
+            <a:extLst xmlns:a="http://schemas.openxmlformats.org/drawingml/2006/main">
+              <a:ext uri="{FF2B5EF4-FFF2-40B4-BE49-F238E27FC236}">
+                <a16:creationId xmlns:a16="http://schemas.microsoft.com/office/drawing/2014/main" id="{DD29B512-F9BB-49FB-A0FE-48BD83463989}"/>
+              </a:ext>
+            </a:extLst>
+          </p:cNvPr>
+          <p:cNvSpPr>
+            <a:spLocks xmlns:a="http://schemas.openxmlformats.org/drawingml/2006/main" noGrp="1"/>
+          </p:cNvSpPr>
+          <p:nvPr/>
+        </p:nvSpPr>
+        <p:spPr>
+          <a:xfrm xmlns:a="http://schemas.openxmlformats.org/drawingml/2006/main">
+            <a:off x="7620000" y="5734050"/>
+            <a:ext cx="4048125" cy="171450"/>
+          </a:xfrm>
+          <a:prstGeom xmlns:a="http://schemas.openxmlformats.org/drawingml/2006/main" prst="rect">
+            <a:avLst/>
+          </a:prstGeom>
+          <a:noFill xmlns:a="http://schemas.openxmlformats.org/drawingml/2006/main"/>
+          <a:ln xmlns:a="http://schemas.openxmlformats.org/drawingml/2006/main" w="0">
+            <a:noFill/>
+          </a:ln>
+        </p:spPr>
+        <p:txBody>
+          <a:bodyPr xmlns:a="http://schemas.openxmlformats.org/drawingml/2006/main">
+            <a:noAutofit/>
+          </a:bodyPr>
+          <a:lstStyle xmlns:a="http://schemas.openxmlformats.org/drawingml/2006/main"/>
+          <a:p xmlns:a="http://schemas.openxmlformats.org/drawingml/2006/main">
+            <a:pPr>
+              <a:defRPr sz="900">
+                <a:solidFill>
+                  <a:srgbClr val="526571"/>
+                </a:solidFill>
+                <a:latin typeface="Arial"/>
+                <a:ea typeface="Arial"/>
+                <a:cs typeface="Arial"/>
+              </a:defRPr>
+            </a:pPr>
+            <a:r>
+              <a:rPr sz="900">
+                <a:solidFill>
+                  <a:srgbClr val="526571"/>
+                </a:solidFill>
+                <a:latin typeface="Arial"/>
+                <a:ea typeface="Arial"/>
+                <a:cs typeface="Arial"/>
+              </a:rPr>
+              <a:t>AI-generated concept image</a:t>
             </a:r>
           </a:p>
         </p:txBody>
@@ -5981,6 +6591,7 @@
           <a:lstStyle xmlns:a="http://schemas.openxmlformats.org/drawingml/2006/main"/>
           <a:p xmlns:a="http://schemas.openxmlformats.org/drawingml/2006/main">
             <a:pPr>
+              <a:buNone/>
               <a:defRPr sz="1200" b="1">
                 <a:solidFill>
                   <a:srgbClr val="2F6079"/>
@@ -6038,6 +6649,7 @@
           <a:lstStyle xmlns:a="http://schemas.openxmlformats.org/drawingml/2006/main"/>
           <a:p xmlns:a="http://schemas.openxmlformats.org/drawingml/2006/main">
             <a:pPr>
+              <a:buNone/>
               <a:defRPr sz="1050" b="0">
                 <a:solidFill>
                   <a:srgbClr val="526571"/>
@@ -6095,6 +6707,7 @@
           <a:lstStyle xmlns:a="http://schemas.openxmlformats.org/drawingml/2006/main"/>
           <a:p xmlns:a="http://schemas.openxmlformats.org/drawingml/2006/main">
             <a:pPr>
+              <a:buNone/>
               <a:defRPr sz="1125" b="1">
                 <a:solidFill>
                   <a:srgbClr val="2F6079"/>
@@ -6152,6 +6765,7 @@
           <a:lstStyle xmlns:a="http://schemas.openxmlformats.org/drawingml/2006/main"/>
           <a:p xmlns:a="http://schemas.openxmlformats.org/drawingml/2006/main">
             <a:pPr>
+              <a:buNone/>
               <a:defRPr sz="2925" b="1">
                 <a:solidFill>
                   <a:srgbClr val="18303F"/>
@@ -6191,8 +6805,8 @@
         </p:nvSpPr>
         <p:spPr>
           <a:xfrm xmlns:a="http://schemas.openxmlformats.org/drawingml/2006/main">
-            <a:off x="514350" y="1962150"/>
-            <a:ext cx="11049000" cy="1181100"/>
+            <a:off x="514350" y="1809750"/>
+            <a:ext cx="11049000" cy="1409700"/>
           </a:xfrm>
           <a:prstGeom xmlns:a="http://schemas.openxmlformats.org/drawingml/2006/main" prst="rect">
             <a:avLst/>
@@ -6209,7 +6823,8 @@
           <a:lstStyle xmlns:a="http://schemas.openxmlformats.org/drawingml/2006/main"/>
           <a:p xmlns:a="http://schemas.openxmlformats.org/drawingml/2006/main">
             <a:pPr>
-              <a:defRPr sz="2025" b="1">
+              <a:buNone/>
+              <a:defRPr sz="1950" b="1">
                 <a:solidFill>
                   <a:srgbClr val="18303F"/>
                 </a:solidFill>
@@ -6219,7 +6834,7 @@
               </a:defRPr>
             </a:pPr>
             <a:r>
-              <a:rPr sz="2025" b="1">
+              <a:rPr sz="1950" b="1">
                 <a:solidFill>
                   <a:srgbClr val="18303F"/>
                 </a:solidFill>
@@ -6248,8 +6863,8 @@
         </p:nvSpPr>
         <p:spPr>
           <a:xfrm xmlns:a="http://schemas.openxmlformats.org/drawingml/2006/main">
-            <a:off x="514350" y="3476625"/>
-            <a:ext cx="742950" cy="495300"/>
+            <a:off x="514350" y="3333750"/>
+            <a:ext cx="742950" cy="666750"/>
           </a:xfrm>
           <a:prstGeom xmlns:a="http://schemas.openxmlformats.org/drawingml/2006/main" prst="rect">
             <a:avLst/>
@@ -6266,6 +6881,7 @@
           <a:lstStyle xmlns:a="http://schemas.openxmlformats.org/drawingml/2006/main"/>
           <a:p xmlns:a="http://schemas.openxmlformats.org/drawingml/2006/main">
             <a:pPr>
+              <a:buNone/>
               <a:defRPr sz="2250" b="1">
                 <a:solidFill>
                   <a:srgbClr val="2F6079"/>
@@ -6305,8 +6921,8 @@
         </p:nvSpPr>
         <p:spPr>
           <a:xfrm xmlns:a="http://schemas.openxmlformats.org/drawingml/2006/main">
-            <a:off x="1485900" y="3476625"/>
-            <a:ext cx="10001250" cy="714375"/>
+            <a:off x="1485900" y="3333750"/>
+            <a:ext cx="6191250" cy="895350"/>
           </a:xfrm>
           <a:prstGeom xmlns:a="http://schemas.openxmlformats.org/drawingml/2006/main" prst="rect">
             <a:avLst/>
@@ -6323,6 +6939,7 @@
           <a:lstStyle xmlns:a="http://schemas.openxmlformats.org/drawingml/2006/main"/>
           <a:p xmlns:a="http://schemas.openxmlformats.org/drawingml/2006/main">
             <a:pPr>
+              <a:buNone/>
               <a:defRPr sz="1800" b="0">
                 <a:solidFill>
                   <a:srgbClr val="18303F"/>
@@ -6362,8 +6979,8 @@
         </p:nvSpPr>
         <p:spPr>
           <a:xfrm xmlns:a="http://schemas.openxmlformats.org/drawingml/2006/main">
-            <a:off x="514350" y="4295775"/>
-            <a:ext cx="742950" cy="495300"/>
+            <a:off x="514350" y="4305300"/>
+            <a:ext cx="742950" cy="666750"/>
           </a:xfrm>
           <a:prstGeom xmlns:a="http://schemas.openxmlformats.org/drawingml/2006/main" prst="rect">
             <a:avLst/>
@@ -6380,6 +6997,7 @@
           <a:lstStyle xmlns:a="http://schemas.openxmlformats.org/drawingml/2006/main"/>
           <a:p xmlns:a="http://schemas.openxmlformats.org/drawingml/2006/main">
             <a:pPr>
+              <a:buNone/>
               <a:defRPr sz="2250" b="1">
                 <a:solidFill>
                   <a:srgbClr val="2F6079"/>
@@ -6419,8 +7037,8 @@
         </p:nvSpPr>
         <p:spPr>
           <a:xfrm xmlns:a="http://schemas.openxmlformats.org/drawingml/2006/main">
-            <a:off x="1485900" y="4295775"/>
-            <a:ext cx="10001250" cy="714375"/>
+            <a:off x="1485900" y="4305300"/>
+            <a:ext cx="6191250" cy="895350"/>
           </a:xfrm>
           <a:prstGeom xmlns:a="http://schemas.openxmlformats.org/drawingml/2006/main" prst="rect">
             <a:avLst/>
@@ -6437,6 +7055,7 @@
           <a:lstStyle xmlns:a="http://schemas.openxmlformats.org/drawingml/2006/main"/>
           <a:p xmlns:a="http://schemas.openxmlformats.org/drawingml/2006/main">
             <a:pPr>
+              <a:buNone/>
               <a:defRPr sz="1800" b="0">
                 <a:solidFill>
                   <a:srgbClr val="18303F"/>
@@ -6476,8 +7095,8 @@
         </p:nvSpPr>
         <p:spPr>
           <a:xfrm xmlns:a="http://schemas.openxmlformats.org/drawingml/2006/main">
-            <a:off x="514350" y="5114925"/>
-            <a:ext cx="742950" cy="495300"/>
+            <a:off x="514350" y="5276850"/>
+            <a:ext cx="742950" cy="666750"/>
           </a:xfrm>
           <a:prstGeom xmlns:a="http://schemas.openxmlformats.org/drawingml/2006/main" prst="rect">
             <a:avLst/>
@@ -6494,6 +7113,7 @@
           <a:lstStyle xmlns:a="http://schemas.openxmlformats.org/drawingml/2006/main"/>
           <a:p xmlns:a="http://schemas.openxmlformats.org/drawingml/2006/main">
             <a:pPr>
+              <a:buNone/>
               <a:defRPr sz="2250" b="1">
                 <a:solidFill>
                   <a:srgbClr val="2F6079"/>
@@ -6533,8 +7153,8 @@
         </p:nvSpPr>
         <p:spPr>
           <a:xfrm xmlns:a="http://schemas.openxmlformats.org/drawingml/2006/main">
-            <a:off x="1485900" y="5114925"/>
-            <a:ext cx="10001250" cy="714375"/>
+            <a:off x="1485900" y="5276850"/>
+            <a:ext cx="6191250" cy="895350"/>
           </a:xfrm>
           <a:prstGeom xmlns:a="http://schemas.openxmlformats.org/drawingml/2006/main" prst="rect">
             <a:avLst/>
@@ -6551,6 +7171,7 @@
           <a:lstStyle xmlns:a="http://schemas.openxmlformats.org/drawingml/2006/main"/>
           <a:p xmlns:a="http://schemas.openxmlformats.org/drawingml/2006/main">
             <a:pPr>
+              <a:buNone/>
               <a:defRPr sz="1800" b="0">
                 <a:solidFill>
                   <a:srgbClr val="18303F"/>
@@ -6570,6 +7191,85 @@
                 <a:cs typeface="Arial"/>
               </a:rPr>
               <a:t>Describe the revision trail and distinguish completed digital work from any physical production or proposed test.</a:t>
+            </a:r>
+          </a:p>
+        </p:txBody>
+      </p:sp>
+      <p:pic>
+        <p:nvPicPr>
+          <p:cNvPr id="28" name=""/>
+          <p:cNvPicPr>
+            <a:picLocks xmlns:a="http://schemas.openxmlformats.org/drawingml/2006/main" noChangeAspect="1"/>
+          </p:cNvPicPr>
+          <p:nvPr/>
+        </p:nvPicPr>
+        <p:blipFill>
+          <a:blip xmlns:r="http://schemas.openxmlformats.org/officeDocument/2006/relationships" xmlns:a="http://schemas.openxmlformats.org/drawingml/2006/main" r:embed="Rfe32ea71dfa1480f"/>
+          <a:stretch xmlns:a="http://schemas.openxmlformats.org/drawingml/2006/main"/>
+        </p:blipFill>
+        <p:spPr>
+          <a:xfrm xmlns:a="http://schemas.openxmlformats.org/drawingml/2006/main">
+            <a:off x="7858125" y="3406775"/>
+            <a:ext cx="3810000" cy="2540000"/>
+          </a:xfrm>
+          <a:prstGeom xmlns:a="http://schemas.openxmlformats.org/drawingml/2006/main" prst="rect">
+            <a:avLst/>
+          </a:prstGeom>
+        </p:spPr>
+      </p:pic>
+      <p:sp>
+        <p:nvSpPr>
+          <p:cNvPr id="15" name="">
+            <a:extLst xmlns:a="http://schemas.openxmlformats.org/drawingml/2006/main">
+              <a:ext uri="{FF2B5EF4-FFF2-40B4-BE49-F238E27FC236}">
+                <a16:creationId xmlns:a16="http://schemas.microsoft.com/office/drawing/2014/main" id="{967DE1AC-A697-488B-A6A7-C60A40BB8CDA}"/>
+              </a:ext>
+            </a:extLst>
+          </p:cNvPr>
+          <p:cNvSpPr>
+            <a:spLocks xmlns:a="http://schemas.openxmlformats.org/drawingml/2006/main" noGrp="1"/>
+          </p:cNvSpPr>
+          <p:nvPr/>
+        </p:nvSpPr>
+        <p:spPr>
+          <a:xfrm xmlns:a="http://schemas.openxmlformats.org/drawingml/2006/main">
+            <a:off x="7858125" y="6067425"/>
+            <a:ext cx="3810000" cy="171450"/>
+          </a:xfrm>
+          <a:prstGeom xmlns:a="http://schemas.openxmlformats.org/drawingml/2006/main" prst="rect">
+            <a:avLst/>
+          </a:prstGeom>
+          <a:noFill xmlns:a="http://schemas.openxmlformats.org/drawingml/2006/main"/>
+          <a:ln xmlns:a="http://schemas.openxmlformats.org/drawingml/2006/main" w="0">
+            <a:noFill/>
+          </a:ln>
+        </p:spPr>
+        <p:txBody>
+          <a:bodyPr xmlns:a="http://schemas.openxmlformats.org/drawingml/2006/main">
+            <a:noAutofit/>
+          </a:bodyPr>
+          <a:lstStyle xmlns:a="http://schemas.openxmlformats.org/drawingml/2006/main"/>
+          <a:p xmlns:a="http://schemas.openxmlformats.org/drawingml/2006/main">
+            <a:pPr>
+              <a:defRPr sz="900">
+                <a:solidFill>
+                  <a:srgbClr val="526571"/>
+                </a:solidFill>
+                <a:latin typeface="Arial"/>
+                <a:ea typeface="Arial"/>
+                <a:cs typeface="Arial"/>
+              </a:defRPr>
+            </a:pPr>
+            <a:r>
+              <a:rPr sz="900">
+                <a:solidFill>
+                  <a:srgbClr val="526571"/>
+                </a:solidFill>
+                <a:latin typeface="Arial"/>
+                <a:ea typeface="Arial"/>
+                <a:cs typeface="Arial"/>
+              </a:rPr>
+              <a:t>AI-generated concept image</a:t>
             </a:r>
           </a:p>
         </p:txBody>
@@ -6667,6 +7367,7 @@
           <a:lstStyle xmlns:a="http://schemas.openxmlformats.org/drawingml/2006/main"/>
           <a:p xmlns:a="http://schemas.openxmlformats.org/drawingml/2006/main">
             <a:pPr>
+              <a:buNone/>
               <a:defRPr sz="1200" b="1">
                 <a:solidFill>
                   <a:srgbClr val="2F6079"/>
@@ -6724,6 +7425,7 @@
           <a:lstStyle xmlns:a="http://schemas.openxmlformats.org/drawingml/2006/main"/>
           <a:p xmlns:a="http://schemas.openxmlformats.org/drawingml/2006/main">
             <a:pPr>
+              <a:buNone/>
               <a:defRPr sz="1050" b="0">
                 <a:solidFill>
                   <a:srgbClr val="526571"/>
@@ -6781,6 +7483,7 @@
           <a:lstStyle xmlns:a="http://schemas.openxmlformats.org/drawingml/2006/main"/>
           <a:p xmlns:a="http://schemas.openxmlformats.org/drawingml/2006/main">
             <a:pPr>
+              <a:buNone/>
               <a:defRPr sz="1125" b="1">
                 <a:solidFill>
                   <a:srgbClr val="2F6079"/>
@@ -6838,6 +7541,7 @@
           <a:lstStyle xmlns:a="http://schemas.openxmlformats.org/drawingml/2006/main"/>
           <a:p xmlns:a="http://schemas.openxmlformats.org/drawingml/2006/main">
             <a:pPr>
+              <a:buNone/>
               <a:defRPr sz="3225" b="1">
                 <a:solidFill>
                   <a:srgbClr val="18303F"/>
@@ -6878,7 +7582,7 @@
         <p:spPr>
           <a:xfrm xmlns:a="http://schemas.openxmlformats.org/drawingml/2006/main">
             <a:off x="514350" y="2038350"/>
-            <a:ext cx="10953750" cy="2190750"/>
+            <a:ext cx="7524750" cy="2571750"/>
           </a:xfrm>
           <a:prstGeom xmlns:a="http://schemas.openxmlformats.org/drawingml/2006/main" prst="rect">
             <a:avLst/>
@@ -6907,8 +7611,8 @@
         </p:nvSpPr>
         <p:spPr>
           <a:xfrm xmlns:a="http://schemas.openxmlformats.org/drawingml/2006/main">
-            <a:off x="800100" y="2314575"/>
-            <a:ext cx="10334625" cy="1647825"/>
+            <a:off x="800100" y="2247900"/>
+            <a:ext cx="6953250" cy="2238375"/>
           </a:xfrm>
           <a:prstGeom xmlns:a="http://schemas.openxmlformats.org/drawingml/2006/main" prst="rect">
             <a:avLst/>
@@ -6925,7 +7629,8 @@
           <a:lstStyle xmlns:a="http://schemas.openxmlformats.org/drawingml/2006/main"/>
           <a:p xmlns:a="http://schemas.openxmlformats.org/drawingml/2006/main">
             <a:pPr>
-              <a:defRPr sz="2325" b="1">
+              <a:buNone/>
+              <a:defRPr sz="2100" b="1">
                 <a:solidFill>
                   <a:srgbClr val="18303F"/>
                 </a:solidFill>
@@ -6935,7 +7640,7 @@
               </a:defRPr>
             </a:pPr>
             <a:r>
-              <a:rPr sz="2325" b="1">
+              <a:rPr sz="2100" b="1">
                 <a:solidFill>
                   <a:srgbClr val="18303F"/>
                 </a:solidFill>
@@ -6948,7 +7653,8 @@
           </a:p>
           <a:p xmlns:a="http://schemas.openxmlformats.org/drawingml/2006/main">
             <a:pPr>
-              <a:defRPr sz="2325" b="1">
+              <a:buNone/>
+              <a:defRPr sz="2100" b="1">
                 <a:solidFill>
                   <a:srgbClr val="18303F"/>
                 </a:solidFill>
@@ -6958,7 +7664,7 @@
               </a:defRPr>
             </a:pPr>
             <a:r>
-              <a:rPr sz="2325" b="1">
+              <a:rPr sz="2100" b="1">
                 <a:solidFill>
                   <a:srgbClr val="18303F"/>
                 </a:solidFill>
@@ -6971,7 +7677,8 @@
           </a:p>
           <a:p xmlns:a="http://schemas.openxmlformats.org/drawingml/2006/main">
             <a:pPr>
-              <a:defRPr sz="2325" b="1">
+              <a:buNone/>
+              <a:defRPr sz="2100" b="1">
                 <a:solidFill>
                   <a:srgbClr val="18303F"/>
                 </a:solidFill>
@@ -6981,7 +7688,7 @@
               </a:defRPr>
             </a:pPr>
             <a:r>
-              <a:rPr sz="2325" b="1">
+              <a:rPr sz="2100" b="1">
                 <a:solidFill>
                   <a:srgbClr val="18303F"/>
                 </a:solidFill>
@@ -7028,6 +7735,7 @@
           <a:lstStyle xmlns:a="http://schemas.openxmlformats.org/drawingml/2006/main"/>
           <a:p xmlns:a="http://schemas.openxmlformats.org/drawingml/2006/main">
             <a:pPr>
+              <a:buNone/>
               <a:defRPr sz="2175" b="1">
                 <a:solidFill>
                   <a:srgbClr val="2F6079"/>
@@ -7085,6 +7793,7 @@
           <a:lstStyle xmlns:a="http://schemas.openxmlformats.org/drawingml/2006/main"/>
           <a:p xmlns:a="http://schemas.openxmlformats.org/drawingml/2006/main">
             <a:pPr>
+              <a:buNone/>
               <a:defRPr sz="1650" b="0">
                 <a:solidFill>
                   <a:srgbClr val="526571"/>
@@ -7104,6 +7813,85 @@
                 <a:cs typeface="Arial"/>
               </a:rPr>
               <a:t>Browser saving keeps a local copy. Export and verify a backup; follow your teacher’s submission instructions.</a:t>
+            </a:r>
+          </a:p>
+        </p:txBody>
+      </p:sp>
+      <p:pic>
+        <p:nvPicPr>
+          <p:cNvPr id="22" name=""/>
+          <p:cNvPicPr>
+            <a:picLocks xmlns:a="http://schemas.openxmlformats.org/drawingml/2006/main" noChangeAspect="1"/>
+          </p:cNvPicPr>
+          <p:nvPr/>
+        </p:nvPicPr>
+        <p:blipFill>
+          <a:blip xmlns:r="http://schemas.openxmlformats.org/officeDocument/2006/relationships" xmlns:a="http://schemas.openxmlformats.org/drawingml/2006/main" r:embed="Rcedf0b6187414dbe"/>
+          <a:stretch xmlns:a="http://schemas.openxmlformats.org/drawingml/2006/main"/>
+        </p:blipFill>
+        <p:spPr>
+          <a:xfrm xmlns:a="http://schemas.openxmlformats.org/drawingml/2006/main">
+            <a:off x="8286750" y="2197100"/>
+            <a:ext cx="3381375" cy="2254250"/>
+          </a:xfrm>
+          <a:prstGeom xmlns:a="http://schemas.openxmlformats.org/drawingml/2006/main" prst="rect">
+            <a:avLst/>
+          </a:prstGeom>
+        </p:spPr>
+      </p:pic>
+      <p:sp>
+        <p:nvSpPr>
+          <p:cNvPr id="12" name="">
+            <a:extLst xmlns:a="http://schemas.openxmlformats.org/drawingml/2006/main">
+              <a:ext uri="{FF2B5EF4-FFF2-40B4-BE49-F238E27FC236}">
+                <a16:creationId xmlns:a16="http://schemas.microsoft.com/office/drawing/2014/main" id="{AD100DCA-A935-4370-9C3D-C714807CDD63}"/>
+              </a:ext>
+            </a:extLst>
+          </p:cNvPr>
+          <p:cNvSpPr>
+            <a:spLocks xmlns:a="http://schemas.openxmlformats.org/drawingml/2006/main" noGrp="1"/>
+          </p:cNvSpPr>
+          <p:nvPr/>
+        </p:nvSpPr>
+        <p:spPr>
+          <a:xfrm xmlns:a="http://schemas.openxmlformats.org/drawingml/2006/main">
+            <a:off x="8286750" y="4543425"/>
+            <a:ext cx="3381375" cy="171450"/>
+          </a:xfrm>
+          <a:prstGeom xmlns:a="http://schemas.openxmlformats.org/drawingml/2006/main" prst="rect">
+            <a:avLst/>
+          </a:prstGeom>
+          <a:noFill xmlns:a="http://schemas.openxmlformats.org/drawingml/2006/main"/>
+          <a:ln xmlns:a="http://schemas.openxmlformats.org/drawingml/2006/main" w="0">
+            <a:noFill/>
+          </a:ln>
+        </p:spPr>
+        <p:txBody>
+          <a:bodyPr xmlns:a="http://schemas.openxmlformats.org/drawingml/2006/main">
+            <a:noAutofit/>
+          </a:bodyPr>
+          <a:lstStyle xmlns:a="http://schemas.openxmlformats.org/drawingml/2006/main"/>
+          <a:p xmlns:a="http://schemas.openxmlformats.org/drawingml/2006/main">
+            <a:pPr>
+              <a:defRPr sz="900">
+                <a:solidFill>
+                  <a:srgbClr val="526571"/>
+                </a:solidFill>
+                <a:latin typeface="Arial"/>
+                <a:ea typeface="Arial"/>
+                <a:cs typeface="Arial"/>
+              </a:defRPr>
+            </a:pPr>
+            <a:r>
+              <a:rPr sz="900">
+                <a:solidFill>
+                  <a:srgbClr val="526571"/>
+                </a:solidFill>
+                <a:latin typeface="Arial"/>
+                <a:ea typeface="Arial"/>
+                <a:cs typeface="Arial"/>
+              </a:rPr>
+              <a:t>AI-generated concept image</a:t>
             </a:r>
           </a:p>
         </p:txBody>
